--- a/Intergrador III/Sistema A.pptx
+++ b/Intergrador III/Sistema A.pptx
@@ -8983,6 +8983,49 @@
           </a:prstGeom>
         </p:spPr>
       </p:pic>
+      <p:cxnSp>
+        <p:nvCxnSpPr>
+          <p:cNvPr id="9" name="Conector: angular 8">
+            <a:extLst>
+              <a:ext uri="{FF2B5EF4-FFF2-40B4-BE49-F238E27FC236}">
+                <a16:creationId xmlns:a16="http://schemas.microsoft.com/office/drawing/2014/main" id="{FCCD6972-2B83-4B41-9D0C-B15CA45867E9}"/>
+              </a:ext>
+            </a:extLst>
+          </p:cNvPr>
+          <p:cNvCxnSpPr>
+            <a:cxnSpLocks/>
+          </p:cNvCxnSpPr>
+          <p:nvPr/>
+        </p:nvCxnSpPr>
+        <p:spPr>
+          <a:xfrm rot="10800000">
+            <a:off x="2707380" y="1712118"/>
+            <a:ext cx="1476000" cy="0"/>
+          </a:xfrm>
+          <a:prstGeom prst="bentConnector3">
+            <a:avLst>
+              <a:gd name="adj1" fmla="val 51613"/>
+            </a:avLst>
+          </a:prstGeom>
+          <a:ln w="19050">
+            <a:tailEnd type="triangle"/>
+          </a:ln>
+        </p:spPr>
+        <p:style>
+          <a:lnRef idx="1">
+            <a:schemeClr val="dk1"/>
+          </a:lnRef>
+          <a:fillRef idx="0">
+            <a:schemeClr val="dk1"/>
+          </a:fillRef>
+          <a:effectRef idx="0">
+            <a:schemeClr val="dk1"/>
+          </a:effectRef>
+          <a:fontRef idx="minor">
+            <a:schemeClr val="tx1"/>
+          </a:fontRef>
+        </p:style>
+      </p:cxnSp>
     </p:spTree>
     <p:extLst>
       <p:ext uri="{BB962C8B-B14F-4D97-AF65-F5344CB8AC3E}">

--- a/Intergrador III/Sistema A.pptx
+++ b/Intergrador III/Sistema A.pptx
@@ -5083,7 +5083,7 @@
         </p:blipFill>
         <p:spPr>
           <a:xfrm>
-            <a:off x="1891" y="0"/>
+            <a:off x="662291" y="-177800"/>
             <a:ext cx="12217004" cy="6872065"/>
           </a:xfrm>
           <a:prstGeom prst="rect">
